--- a/projetos/gestao-ia-planilhas/produto/kit-completo/entrega/17-modelo-proposta-comercial-10-slides.pptx
+++ b/projetos/gestao-ia-planilhas/produto/kit-completo/entrega/17-modelo-proposta-comercial-10-slides.pptx
@@ -511,7 +511,7 @@
           <a:p>
             <a:r>
               <a:rPr lang="en-US" dirty="0"/>
-              <a:t>Capa. Título é o que o cliente compra, não o nome do serviço. Validade sempre na capa.</a:t>
+              <a:t>Modelo do Seu Sócio Gestor: troque os textos e mantenha a estrutura. Capa. Título é o que o cliente compra, não o nome do serviço. Validade sempre na capa.</a:t>
             </a:r>
             <a:endParaRPr lang="en-US" dirty="0"/>
           </a:p>
@@ -1909,8 +1909,8 @@
         </p:nvSpPr>
         <p:spPr>
           <a:xfrm>
-            <a:off x="457200" y="4773168"/>
-            <a:ext cx="6858000" cy="228600"/>
+            <a:off x="457200" y="4791456"/>
+            <a:ext cx="6858000" cy="201168"/>
           </a:xfrm>
           <a:prstGeom prst="rect">
             <a:avLst/>
@@ -1926,17 +1926,17 @@
               <a:buNone/>
             </a:pPr>
             <a:r>
-              <a:rPr lang="en-US" sz="800" dirty="0">
-                <a:solidFill>
-                  <a:srgbClr val="B89BE0"/>
-                </a:solidFill>
-                <a:latin typeface="Arial" pitchFamily="34" charset="0"/>
-                <a:ea typeface="Arial" pitchFamily="34" charset="-122"/>
-                <a:cs typeface="Arial" pitchFamily="34" charset="-120"/>
-              </a:rPr>
-              <a:t>Kit IA no Trabalho · Completo · modelo do Seu Sócio Gestor. Troque os textos; mantenha a estrutura.</a:t>
-            </a:r>
-            <a:endParaRPr lang="en-US" sz="800" dirty="0"/>
+              <a:rPr lang="en-US" sz="700" dirty="0">
+                <a:solidFill>
+                  <a:srgbClr val="7A5AA8"/>
+                </a:solidFill>
+                <a:latin typeface="Arial" pitchFamily="34" charset="0"/>
+                <a:ea typeface="Arial" pitchFamily="34" charset="-122"/>
+                <a:cs typeface="Arial" pitchFamily="34" charset="-120"/>
+              </a:rPr>
+              <a:t>Kit IA no Trabalho · modelo v1.0 · set/2026</a:t>
+            </a:r>
+            <a:endParaRPr lang="en-US" sz="700" dirty="0"/>
           </a:p>
         </p:txBody>
       </p:sp>
@@ -2212,8 +2212,8 @@
         </p:nvSpPr>
         <p:spPr>
           <a:xfrm>
-            <a:off x="457200" y="4773168"/>
-            <a:ext cx="6858000" cy="228600"/>
+            <a:off x="457200" y="4791456"/>
+            <a:ext cx="6858000" cy="201168"/>
           </a:xfrm>
           <a:prstGeom prst="rect">
             <a:avLst/>
@@ -2229,17 +2229,17 @@
               <a:buNone/>
             </a:pPr>
             <a:r>
-              <a:rPr lang="en-US" sz="800" dirty="0">
-                <a:solidFill>
-                  <a:srgbClr val="B89BE0"/>
-                </a:solidFill>
-                <a:latin typeface="Arial" pitchFamily="34" charset="0"/>
-                <a:ea typeface="Arial" pitchFamily="34" charset="-122"/>
-                <a:cs typeface="Arial" pitchFamily="34" charset="-120"/>
-              </a:rPr>
-              <a:t>Kit IA no Trabalho · Completo · modelo do Seu Sócio Gestor. Troque os textos; mantenha a estrutura.</a:t>
-            </a:r>
-            <a:endParaRPr lang="en-US" sz="800" dirty="0"/>
+              <a:rPr lang="en-US" sz="700" dirty="0">
+                <a:solidFill>
+                  <a:srgbClr val="7A5AA8"/>
+                </a:solidFill>
+                <a:latin typeface="Arial" pitchFamily="34" charset="0"/>
+                <a:ea typeface="Arial" pitchFamily="34" charset="-122"/>
+                <a:cs typeface="Arial" pitchFamily="34" charset="-120"/>
+              </a:rPr>
+              <a:t>Kit IA no Trabalho · modelo v1.0 · set/2026</a:t>
+            </a:r>
+            <a:endParaRPr lang="en-US" sz="700" dirty="0"/>
           </a:p>
         </p:txBody>
       </p:sp>
@@ -2593,8 +2593,8 @@
         </p:nvSpPr>
         <p:spPr>
           <a:xfrm>
-            <a:off x="457200" y="4773168"/>
-            <a:ext cx="6858000" cy="228600"/>
+            <a:off x="457200" y="4791456"/>
+            <a:ext cx="6858000" cy="201168"/>
           </a:xfrm>
           <a:prstGeom prst="rect">
             <a:avLst/>
@@ -2610,17 +2610,17 @@
               <a:buNone/>
             </a:pPr>
             <a:r>
-              <a:rPr lang="en-US" sz="800" dirty="0">
-                <a:solidFill>
-                  <a:srgbClr val="7A5AA8"/>
-                </a:solidFill>
-                <a:latin typeface="Arial" pitchFamily="34" charset="0"/>
-                <a:ea typeface="Arial" pitchFamily="34" charset="-122"/>
-                <a:cs typeface="Arial" pitchFamily="34" charset="-120"/>
-              </a:rPr>
-              <a:t>Kit IA no Trabalho · Completo · modelo do Seu Sócio Gestor. Troque os textos; mantenha a estrutura.</a:t>
-            </a:r>
-            <a:endParaRPr lang="en-US" sz="800" dirty="0"/>
+              <a:rPr lang="en-US" sz="700" dirty="0">
+                <a:solidFill>
+                  <a:srgbClr val="B89BE0"/>
+                </a:solidFill>
+                <a:latin typeface="Arial" pitchFamily="34" charset="0"/>
+                <a:ea typeface="Arial" pitchFamily="34" charset="-122"/>
+                <a:cs typeface="Arial" pitchFamily="34" charset="-120"/>
+              </a:rPr>
+              <a:t>Kit IA no Trabalho · modelo v1.0 · set/2026</a:t>
+            </a:r>
+            <a:endParaRPr lang="en-US" sz="700" dirty="0"/>
           </a:p>
         </p:txBody>
       </p:sp>
@@ -3288,8 +3288,8 @@
         </p:nvSpPr>
         <p:spPr>
           <a:xfrm>
-            <a:off x="457200" y="4773168"/>
-            <a:ext cx="6858000" cy="228600"/>
+            <a:off x="457200" y="4791456"/>
+            <a:ext cx="6858000" cy="201168"/>
           </a:xfrm>
           <a:prstGeom prst="rect">
             <a:avLst/>
@@ -3305,17 +3305,17 @@
               <a:buNone/>
             </a:pPr>
             <a:r>
-              <a:rPr lang="en-US" sz="800" dirty="0">
-                <a:solidFill>
-                  <a:srgbClr val="7A5AA8"/>
-                </a:solidFill>
-                <a:latin typeface="Arial" pitchFamily="34" charset="0"/>
-                <a:ea typeface="Arial" pitchFamily="34" charset="-122"/>
-                <a:cs typeface="Arial" pitchFamily="34" charset="-120"/>
-              </a:rPr>
-              <a:t>Kit IA no Trabalho · Completo · modelo do Seu Sócio Gestor. Troque os textos; mantenha a estrutura.</a:t>
-            </a:r>
-            <a:endParaRPr lang="en-US" sz="800" dirty="0"/>
+              <a:rPr lang="en-US" sz="700" dirty="0">
+                <a:solidFill>
+                  <a:srgbClr val="B89BE0"/>
+                </a:solidFill>
+                <a:latin typeface="Arial" pitchFamily="34" charset="0"/>
+                <a:ea typeface="Arial" pitchFamily="34" charset="-122"/>
+                <a:cs typeface="Arial" pitchFamily="34" charset="-120"/>
+              </a:rPr>
+              <a:t>Kit IA no Trabalho · modelo v1.0 · set/2026</a:t>
+            </a:r>
+            <a:endParaRPr lang="en-US" sz="700" dirty="0"/>
           </a:p>
         </p:txBody>
       </p:sp>
@@ -4559,8 +4559,8 @@
         </p:nvSpPr>
         <p:spPr>
           <a:xfrm>
-            <a:off x="457200" y="4773168"/>
-            <a:ext cx="6858000" cy="228600"/>
+            <a:off x="457200" y="4791456"/>
+            <a:ext cx="6858000" cy="201168"/>
           </a:xfrm>
           <a:prstGeom prst="rect">
             <a:avLst/>
@@ -4576,17 +4576,17 @@
               <a:buNone/>
             </a:pPr>
             <a:r>
-              <a:rPr lang="en-US" sz="800" dirty="0">
-                <a:solidFill>
-                  <a:srgbClr val="7A5AA8"/>
-                </a:solidFill>
-                <a:latin typeface="Arial" pitchFamily="34" charset="0"/>
-                <a:ea typeface="Arial" pitchFamily="34" charset="-122"/>
-                <a:cs typeface="Arial" pitchFamily="34" charset="-120"/>
-              </a:rPr>
-              <a:t>Kit IA no Trabalho · Completo · modelo do Seu Sócio Gestor. Troque os textos; mantenha a estrutura.</a:t>
-            </a:r>
-            <a:endParaRPr lang="en-US" sz="800" dirty="0"/>
+              <a:rPr lang="en-US" sz="700" dirty="0">
+                <a:solidFill>
+                  <a:srgbClr val="B89BE0"/>
+                </a:solidFill>
+                <a:latin typeface="Arial" pitchFamily="34" charset="0"/>
+                <a:ea typeface="Arial" pitchFamily="34" charset="-122"/>
+                <a:cs typeface="Arial" pitchFamily="34" charset="-120"/>
+              </a:rPr>
+              <a:t>Kit IA no Trabalho · modelo v1.0 · set/2026</a:t>
+            </a:r>
+            <a:endParaRPr lang="en-US" sz="700" dirty="0"/>
           </a:p>
         </p:txBody>
       </p:sp>
@@ -4922,8 +4922,8 @@
         </p:nvSpPr>
         <p:spPr>
           <a:xfrm>
-            <a:off x="457200" y="4773168"/>
-            <a:ext cx="6858000" cy="228600"/>
+            <a:off x="457200" y="4791456"/>
+            <a:ext cx="6858000" cy="201168"/>
           </a:xfrm>
           <a:prstGeom prst="rect">
             <a:avLst/>
@@ -4939,17 +4939,17 @@
               <a:buNone/>
             </a:pPr>
             <a:r>
-              <a:rPr lang="en-US" sz="800" dirty="0">
-                <a:solidFill>
-                  <a:srgbClr val="7A5AA8"/>
-                </a:solidFill>
-                <a:latin typeface="Arial" pitchFamily="34" charset="0"/>
-                <a:ea typeface="Arial" pitchFamily="34" charset="-122"/>
-                <a:cs typeface="Arial" pitchFamily="34" charset="-120"/>
-              </a:rPr>
-              <a:t>Kit IA no Trabalho · Completo · modelo do Seu Sócio Gestor. Troque os textos; mantenha a estrutura.</a:t>
-            </a:r>
-            <a:endParaRPr lang="en-US" sz="800" dirty="0"/>
+              <a:rPr lang="en-US" sz="700" dirty="0">
+                <a:solidFill>
+                  <a:srgbClr val="B89BE0"/>
+                </a:solidFill>
+                <a:latin typeface="Arial" pitchFamily="34" charset="0"/>
+                <a:ea typeface="Arial" pitchFamily="34" charset="-122"/>
+                <a:cs typeface="Arial" pitchFamily="34" charset="-120"/>
+              </a:rPr>
+              <a:t>Kit IA no Trabalho · modelo v1.0 · set/2026</a:t>
+            </a:r>
+            <a:endParaRPr lang="en-US" sz="700" dirty="0"/>
           </a:p>
         </p:txBody>
       </p:sp>
@@ -5911,8 +5911,8 @@
         </p:nvSpPr>
         <p:spPr>
           <a:xfrm>
-            <a:off x="457200" y="4773168"/>
-            <a:ext cx="6858000" cy="228600"/>
+            <a:off x="457200" y="4791456"/>
+            <a:ext cx="6858000" cy="201168"/>
           </a:xfrm>
           <a:prstGeom prst="rect">
             <a:avLst/>
@@ -5928,17 +5928,17 @@
               <a:buNone/>
             </a:pPr>
             <a:r>
-              <a:rPr lang="en-US" sz="800" dirty="0">
-                <a:solidFill>
-                  <a:srgbClr val="7A5AA8"/>
-                </a:solidFill>
-                <a:latin typeface="Arial" pitchFamily="34" charset="0"/>
-                <a:ea typeface="Arial" pitchFamily="34" charset="-122"/>
-                <a:cs typeface="Arial" pitchFamily="34" charset="-120"/>
-              </a:rPr>
-              <a:t>Kit IA no Trabalho · Completo · modelo do Seu Sócio Gestor. Troque os textos; mantenha a estrutura.</a:t>
-            </a:r>
-            <a:endParaRPr lang="en-US" sz="800" dirty="0"/>
+              <a:rPr lang="en-US" sz="700" dirty="0">
+                <a:solidFill>
+                  <a:srgbClr val="B89BE0"/>
+                </a:solidFill>
+                <a:latin typeface="Arial" pitchFamily="34" charset="0"/>
+                <a:ea typeface="Arial" pitchFamily="34" charset="-122"/>
+                <a:cs typeface="Arial" pitchFamily="34" charset="-120"/>
+              </a:rPr>
+              <a:t>Kit IA no Trabalho · modelo v1.0 · set/2026</a:t>
+            </a:r>
+            <a:endParaRPr lang="en-US" sz="700" dirty="0"/>
           </a:p>
         </p:txBody>
       </p:sp>
@@ -6883,8 +6883,8 @@
         </p:nvSpPr>
         <p:spPr>
           <a:xfrm>
-            <a:off x="457200" y="4773168"/>
-            <a:ext cx="6858000" cy="228600"/>
+            <a:off x="457200" y="4791456"/>
+            <a:ext cx="6858000" cy="201168"/>
           </a:xfrm>
           <a:prstGeom prst="rect">
             <a:avLst/>
@@ -6900,17 +6900,17 @@
               <a:buNone/>
             </a:pPr>
             <a:r>
-              <a:rPr lang="en-US" sz="800" dirty="0">
-                <a:solidFill>
-                  <a:srgbClr val="7A5AA8"/>
-                </a:solidFill>
-                <a:latin typeface="Arial" pitchFamily="34" charset="0"/>
-                <a:ea typeface="Arial" pitchFamily="34" charset="-122"/>
-                <a:cs typeface="Arial" pitchFamily="34" charset="-120"/>
-              </a:rPr>
-              <a:t>Kit IA no Trabalho · Completo · modelo do Seu Sócio Gestor. Troque os textos; mantenha a estrutura.</a:t>
-            </a:r>
-            <a:endParaRPr lang="en-US" sz="800" dirty="0"/>
+              <a:rPr lang="en-US" sz="700" dirty="0">
+                <a:solidFill>
+                  <a:srgbClr val="B89BE0"/>
+                </a:solidFill>
+                <a:latin typeface="Arial" pitchFamily="34" charset="0"/>
+                <a:ea typeface="Arial" pitchFamily="34" charset="-122"/>
+                <a:cs typeface="Arial" pitchFamily="34" charset="-120"/>
+              </a:rPr>
+              <a:t>Kit IA no Trabalho · modelo v1.0 · set/2026</a:t>
+            </a:r>
+            <a:endParaRPr lang="en-US" sz="700" dirty="0"/>
           </a:p>
         </p:txBody>
       </p:sp>
@@ -7617,8 +7617,8 @@
         </p:nvSpPr>
         <p:spPr>
           <a:xfrm>
-            <a:off x="457200" y="4773168"/>
-            <a:ext cx="6858000" cy="228600"/>
+            <a:off x="457200" y="4791456"/>
+            <a:ext cx="6858000" cy="201168"/>
           </a:xfrm>
           <a:prstGeom prst="rect">
             <a:avLst/>
@@ -7634,17 +7634,17 @@
               <a:buNone/>
             </a:pPr>
             <a:r>
-              <a:rPr lang="en-US" sz="800" dirty="0">
-                <a:solidFill>
-                  <a:srgbClr val="7A5AA8"/>
-                </a:solidFill>
-                <a:latin typeface="Arial" pitchFamily="34" charset="0"/>
-                <a:ea typeface="Arial" pitchFamily="34" charset="-122"/>
-                <a:cs typeface="Arial" pitchFamily="34" charset="-120"/>
-              </a:rPr>
-              <a:t>Kit IA no Trabalho · Completo · modelo do Seu Sócio Gestor. Troque os textos; mantenha a estrutura.</a:t>
-            </a:r>
-            <a:endParaRPr lang="en-US" sz="800" dirty="0"/>
+              <a:rPr lang="en-US" sz="700" dirty="0">
+                <a:solidFill>
+                  <a:srgbClr val="B89BE0"/>
+                </a:solidFill>
+                <a:latin typeface="Arial" pitchFamily="34" charset="0"/>
+                <a:ea typeface="Arial" pitchFamily="34" charset="-122"/>
+                <a:cs typeface="Arial" pitchFamily="34" charset="-120"/>
+              </a:rPr>
+              <a:t>Kit IA no Trabalho · modelo v1.0 · set/2026</a:t>
+            </a:r>
+            <a:endParaRPr lang="en-US" sz="700" dirty="0"/>
           </a:p>
         </p:txBody>
       </p:sp>
@@ -7959,8 +7959,8 @@
         </p:nvSpPr>
         <p:spPr>
           <a:xfrm>
-            <a:off x="457200" y="4773168"/>
-            <a:ext cx="6858000" cy="228600"/>
+            <a:off x="457200" y="4791456"/>
+            <a:ext cx="6858000" cy="201168"/>
           </a:xfrm>
           <a:prstGeom prst="rect">
             <a:avLst/>
@@ -7976,17 +7976,17 @@
               <a:buNone/>
             </a:pPr>
             <a:r>
-              <a:rPr lang="en-US" sz="800" dirty="0">
-                <a:solidFill>
-                  <a:srgbClr val="7A5AA8"/>
-                </a:solidFill>
-                <a:latin typeface="Arial" pitchFamily="34" charset="0"/>
-                <a:ea typeface="Arial" pitchFamily="34" charset="-122"/>
-                <a:cs typeface="Arial" pitchFamily="34" charset="-120"/>
-              </a:rPr>
-              <a:t>Kit IA no Trabalho · Completo · modelo do Seu Sócio Gestor. Troque os textos; mantenha a estrutura.</a:t>
-            </a:r>
-            <a:endParaRPr lang="en-US" sz="800" dirty="0"/>
+              <a:rPr lang="en-US" sz="700" dirty="0">
+                <a:solidFill>
+                  <a:srgbClr val="B89BE0"/>
+                </a:solidFill>
+                <a:latin typeface="Arial" pitchFamily="34" charset="0"/>
+                <a:ea typeface="Arial" pitchFamily="34" charset="-122"/>
+                <a:cs typeface="Arial" pitchFamily="34" charset="-120"/>
+              </a:rPr>
+              <a:t>Kit IA no Trabalho · modelo v1.0 · set/2026</a:t>
+            </a:r>
+            <a:endParaRPr lang="en-US" sz="700" dirty="0"/>
           </a:p>
         </p:txBody>
       </p:sp>
